--- a/lecture_slides/Week2_Lecture3_Sampling_Aliasing_090126_forClass.pptx
+++ b/lecture_slides/Week2_Lecture3_Sampling_Aliasing_090126_forClass.pptx
@@ -5,7 +5,7 @@
     <p:sldMasterId id="2147483648" r:id="rId1"/>
   </p:sldMasterIdLst>
   <p:notesMasterIdLst>
-    <p:notesMasterId r:id="rId26"/>
+    <p:notesMasterId r:id="rId27"/>
   </p:notesMasterIdLst>
   <p:sldIdLst>
     <p:sldId id="280" r:id="rId2"/>
@@ -16,22 +16,23 @@
     <p:sldId id="260" r:id="rId7"/>
     <p:sldId id="261" r:id="rId8"/>
     <p:sldId id="262" r:id="rId9"/>
-    <p:sldId id="263" r:id="rId10"/>
-    <p:sldId id="264" r:id="rId11"/>
-    <p:sldId id="265" r:id="rId12"/>
-    <p:sldId id="266" r:id="rId13"/>
-    <p:sldId id="267" r:id="rId14"/>
-    <p:sldId id="268" r:id="rId15"/>
-    <p:sldId id="269" r:id="rId16"/>
-    <p:sldId id="270" r:id="rId17"/>
-    <p:sldId id="271" r:id="rId18"/>
-    <p:sldId id="272" r:id="rId19"/>
-    <p:sldId id="273" r:id="rId20"/>
-    <p:sldId id="274" r:id="rId21"/>
-    <p:sldId id="275" r:id="rId22"/>
-    <p:sldId id="276" r:id="rId23"/>
-    <p:sldId id="278" r:id="rId24"/>
-    <p:sldId id="277" r:id="rId25"/>
+    <p:sldId id="281" r:id="rId10"/>
+    <p:sldId id="263" r:id="rId11"/>
+    <p:sldId id="264" r:id="rId12"/>
+    <p:sldId id="265" r:id="rId13"/>
+    <p:sldId id="266" r:id="rId14"/>
+    <p:sldId id="267" r:id="rId15"/>
+    <p:sldId id="268" r:id="rId16"/>
+    <p:sldId id="269" r:id="rId17"/>
+    <p:sldId id="270" r:id="rId18"/>
+    <p:sldId id="271" r:id="rId19"/>
+    <p:sldId id="272" r:id="rId20"/>
+    <p:sldId id="273" r:id="rId21"/>
+    <p:sldId id="274" r:id="rId22"/>
+    <p:sldId id="275" r:id="rId23"/>
+    <p:sldId id="276" r:id="rId24"/>
+    <p:sldId id="278" r:id="rId25"/>
+    <p:sldId id="277" r:id="rId26"/>
   </p:sldIdLst>
   <p:sldSz cx="12192000" cy="6858000"/>
   <p:notesSz cx="6858000" cy="12192000"/>
@@ -415,7 +416,7 @@
           <a:p>
             <a:fld id="{F7021451-1387-4CA6-816F-3879F97B5CBC}" type="slidenum">
               <a:rPr lang="en-US"/>
-              <a:t>11</a:t>
+              <a:t>12</a:t>
             </a:fld>
             <a:endParaRPr lang="en-US"/>
           </a:p>
@@ -502,7 +503,7 @@
           <a:p>
             <a:fld id="{F7021451-1387-4CA6-816F-3879F97B5CBC}" type="slidenum">
               <a:rPr lang="en-US"/>
-              <a:t>12</a:t>
+              <a:t>13</a:t>
             </a:fld>
             <a:endParaRPr lang="en-US"/>
           </a:p>
@@ -589,7 +590,7 @@
           <a:p>
             <a:fld id="{F7021451-1387-4CA6-816F-3879F97B5CBC}" type="slidenum">
               <a:rPr lang="en-US"/>
-              <a:t>13</a:t>
+              <a:t>14</a:t>
             </a:fld>
             <a:endParaRPr lang="en-US"/>
           </a:p>
@@ -676,7 +677,7 @@
           <a:p>
             <a:fld id="{F7021451-1387-4CA6-816F-3879F97B5CBC}" type="slidenum">
               <a:rPr lang="en-US"/>
-              <a:t>14</a:t>
+              <a:t>15</a:t>
             </a:fld>
             <a:endParaRPr lang="en-US"/>
           </a:p>
@@ -763,7 +764,7 @@
           <a:p>
             <a:fld id="{F7021451-1387-4CA6-816F-3879F97B5CBC}" type="slidenum">
               <a:rPr lang="en-US"/>
-              <a:t>15</a:t>
+              <a:t>16</a:t>
             </a:fld>
             <a:endParaRPr lang="en-US"/>
           </a:p>
@@ -850,7 +851,7 @@
           <a:p>
             <a:fld id="{F7021451-1387-4CA6-816F-3879F97B5CBC}" type="slidenum">
               <a:rPr lang="en-US"/>
-              <a:t>16</a:t>
+              <a:t>17</a:t>
             </a:fld>
             <a:endParaRPr lang="en-US"/>
           </a:p>
@@ -937,7 +938,7 @@
           <a:p>
             <a:fld id="{F7021451-1387-4CA6-816F-3879F97B5CBC}" type="slidenum">
               <a:rPr lang="en-US"/>
-              <a:t>17</a:t>
+              <a:t>18</a:t>
             </a:fld>
             <a:endParaRPr lang="en-US"/>
           </a:p>
@@ -1024,7 +1025,7 @@
           <a:p>
             <a:fld id="{F7021451-1387-4CA6-816F-3879F97B5CBC}" type="slidenum">
               <a:rPr lang="en-US"/>
-              <a:t>18</a:t>
+              <a:t>19</a:t>
             </a:fld>
             <a:endParaRPr lang="en-US"/>
           </a:p>
@@ -1111,7 +1112,7 @@
           <a:p>
             <a:fld id="{F7021451-1387-4CA6-816F-3879F97B5CBC}" type="slidenum">
               <a:rPr lang="en-US"/>
-              <a:t>19</a:t>
+              <a:t>20</a:t>
             </a:fld>
             <a:endParaRPr lang="en-US"/>
           </a:p>
@@ -1198,7 +1199,7 @@
           <a:p>
             <a:fld id="{F7021451-1387-4CA6-816F-3879F97B5CBC}" type="slidenum">
               <a:rPr lang="en-US"/>
-              <a:t>20</a:t>
+              <a:t>21</a:t>
             </a:fld>
             <a:endParaRPr lang="en-US"/>
           </a:p>
@@ -1372,7 +1373,7 @@
           <a:p>
             <a:fld id="{F7021451-1387-4CA6-816F-3879F97B5CBC}" type="slidenum">
               <a:rPr lang="en-US"/>
-              <a:t>21</a:t>
+              <a:t>22</a:t>
             </a:fld>
             <a:endParaRPr lang="en-US"/>
           </a:p>
@@ -1459,7 +1460,7 @@
           <a:p>
             <a:fld id="{F7021451-1387-4CA6-816F-3879F97B5CBC}" type="slidenum">
               <a:rPr lang="en-US"/>
-              <a:t>22</a:t>
+              <a:t>23</a:t>
             </a:fld>
             <a:endParaRPr lang="en-US"/>
           </a:p>
@@ -1570,7 +1571,7 @@
           <a:p>
             <a:fld id="{F7021451-1387-4CA6-816F-3879F97B5CBC}" type="slidenum">
               <a:rPr lang="en-US"/>
-              <a:t>23</a:t>
+              <a:t>24</a:t>
             </a:fld>
             <a:endParaRPr lang="en-US"/>
           </a:p>
@@ -1657,7 +1658,7 @@
           <a:p>
             <a:fld id="{F7021451-1387-4CA6-816F-3879F97B5CBC}" type="slidenum">
               <a:rPr lang="en-US"/>
-              <a:t>24</a:t>
+              <a:t>25</a:t>
             </a:fld>
             <a:endParaRPr lang="en-US"/>
           </a:p>
@@ -2179,7 +2180,7 @@
           <a:p>
             <a:fld id="{F7021451-1387-4CA6-816F-3879F97B5CBC}" type="slidenum">
               <a:rPr lang="en-US"/>
-              <a:t>9</a:t>
+              <a:t>10</a:t>
             </a:fld>
             <a:endParaRPr lang="en-US"/>
           </a:p>
@@ -2266,7 +2267,7 @@
           <a:p>
             <a:fld id="{F7021451-1387-4CA6-816F-3879F97B5CBC}" type="slidenum">
               <a:rPr lang="en-US"/>
-              <a:t>10</a:t>
+              <a:t>11</a:t>
             </a:fld>
             <a:endParaRPr lang="en-US"/>
           </a:p>
@@ -2461,7 +2462,7 @@
           </a:prstGeom>
           <a:extLst>
             <a:ext uri="{C572A759-6A51-4108-AA02-DFA0A04FC94B}">
-              <ma14:wrappingTextBoxFlag xmlns:ma14="http://schemas.microsoft.com/office/mac/drawingml/2011/main" xmlns="" val="0"/>
+              <ma14:wrappingTextBoxFlag xmlns="" xmlns:ma14="http://schemas.microsoft.com/office/mac/drawingml/2011/main" val="0"/>
             </a:ext>
           </a:extLst>
         </p:spPr>
@@ -2539,7 +2540,7 @@
           </a:prstGeom>
           <a:extLst>
             <a:ext uri="{C572A759-6A51-4108-AA02-DFA0A04FC94B}">
-              <ma14:wrappingTextBoxFlag xmlns:ma14="http://schemas.microsoft.com/office/mac/drawingml/2011/main" xmlns="" val="0"/>
+              <ma14:wrappingTextBoxFlag xmlns="" xmlns:ma14="http://schemas.microsoft.com/office/mac/drawingml/2011/main" val="0"/>
             </a:ext>
           </a:extLst>
         </p:spPr>
@@ -2975,6 +2976,411 @@
 
 <file path=ppt/slides/slide10.xml><?xml version="1.0" encoding="utf-8"?>
 <p:sld xmlns:a="http://schemas.openxmlformats.org/drawingml/2006/main" xmlns:r="http://schemas.openxmlformats.org/officeDocument/2006/relationships" xmlns:p="http://schemas.openxmlformats.org/presentationml/2006/main">
+  <p:cSld name="Slide 8">
+    <p:spTree>
+      <p:nvGrpSpPr>
+        <p:cNvPr id="1" name=""/>
+        <p:cNvGrpSpPr/>
+        <p:nvPr/>
+      </p:nvGrpSpPr>
+      <p:grpSpPr>
+        <a:xfrm>
+          <a:off x="0" y="0"/>
+          <a:ext cx="0" cy="0"/>
+          <a:chOff x="0" y="0"/>
+          <a:chExt cx="0" cy="0"/>
+        </a:xfrm>
+      </p:grpSpPr>
+      <p:sp>
+        <p:nvSpPr>
+          <p:cNvPr id="2" name="Text 0"/>
+          <p:cNvSpPr/>
+          <p:nvPr/>
+        </p:nvSpPr>
+        <p:spPr>
+          <a:xfrm>
+            <a:off x="566928" y="384048"/>
+            <a:ext cx="11018520" cy="457200"/>
+          </a:xfrm>
+          <a:prstGeom prst="rect">
+            <a:avLst/>
+          </a:prstGeom>
+          <a:noFill/>
+          <a:ln/>
+        </p:spPr>
+        <p:txBody>
+          <a:bodyPr wrap="square" lIns="0" tIns="0" rIns="0" bIns="0" rtlCol="0" anchor="ctr"/>
+          <a:lstStyle/>
+          <a:p>
+            <a:pPr marL="0" indent="0">
+              <a:buNone/>
+            </a:pPr>
+            <a:r>
+              <a:rPr lang="en-US" sz="3000" b="1" dirty="0">
+                <a:solidFill>
+                  <a:srgbClr val="16324F"/>
+                </a:solidFill>
+                <a:latin typeface="Aptos" pitchFamily="34" charset="0"/>
+                <a:ea typeface="Aptos" pitchFamily="34" charset="-122"/>
+                <a:cs typeface="Aptos" pitchFamily="34" charset="-120"/>
+              </a:rPr>
+              <a:t>The impulse train is periodic in both time and frequency</a:t>
+            </a:r>
+            <a:endParaRPr lang="en-US" sz="3000" dirty="0"/>
+          </a:p>
+        </p:txBody>
+      </p:sp>
+      <p:sp>
+        <p:nvSpPr>
+          <p:cNvPr id="3" name="Text 1"/>
+          <p:cNvSpPr/>
+          <p:nvPr/>
+        </p:nvSpPr>
+        <p:spPr>
+          <a:xfrm>
+            <a:off x="594360" y="886968"/>
+            <a:ext cx="10789920" cy="310896"/>
+          </a:xfrm>
+          <a:prstGeom prst="rect">
+            <a:avLst/>
+          </a:prstGeom>
+          <a:noFill/>
+          <a:ln/>
+        </p:spPr>
+        <p:txBody>
+          <a:bodyPr wrap="square" lIns="0" tIns="0" rIns="0" bIns="0" rtlCol="0" anchor="ctr"/>
+          <a:lstStyle/>
+          <a:p>
+            <a:pPr marL="0" indent="0">
+              <a:buNone/>
+            </a:pPr>
+            <a:r>
+              <a:rPr lang="en-US" sz="1550" dirty="0">
+                <a:solidFill>
+                  <a:srgbClr val="53616E"/>
+                </a:solidFill>
+                <a:latin typeface="Aptos" pitchFamily="34" charset="0"/>
+                <a:ea typeface="Aptos" pitchFamily="34" charset="-122"/>
+                <a:cs typeface="Aptos" pitchFamily="34" charset="-120"/>
+              </a:rPr>
+              <a:t>A periodic train of impulses transforms to another impulse train.</a:t>
+            </a:r>
+            <a:endParaRPr lang="en-US" sz="1550" dirty="0"/>
+          </a:p>
+        </p:txBody>
+      </p:sp>
+      <p:sp>
+        <p:nvSpPr>
+          <p:cNvPr id="4" name="Shape 2"/>
+          <p:cNvSpPr/>
+          <p:nvPr/>
+        </p:nvSpPr>
+        <p:spPr>
+          <a:xfrm>
+            <a:off x="749808" y="1271016"/>
+            <a:ext cx="3986784" cy="749808"/>
+          </a:xfrm>
+          <a:prstGeom prst="roundRect">
+            <a:avLst>
+              <a:gd name="adj" fmla="val 6098"/>
+            </a:avLst>
+          </a:prstGeom>
+          <a:solidFill>
+            <a:srgbClr val="F7FAFC"/>
+          </a:solidFill>
+          <a:ln w="12700">
+            <a:solidFill>
+              <a:srgbClr val="DCE6EC"/>
+            </a:solidFill>
+            <a:prstDash val="solid"/>
+          </a:ln>
+        </p:spPr>
+        <p:txBody>
+          <a:bodyPr/>
+          <a:lstStyle/>
+          <a:p>
+            <a:endParaRPr lang="en-US"/>
+          </a:p>
+        </p:txBody>
+      </p:sp>
+      <p:pic>
+        <p:nvPicPr>
+          <p:cNvPr id="5" name="Image 0" descr="preencoded.png"/>
+          <p:cNvPicPr>
+            <a:picLocks noChangeAspect="1"/>
+          </p:cNvPicPr>
+          <p:nvPr/>
+        </p:nvPicPr>
+        <p:blipFill>
+          <a:blip>
+            <a:extLst>
+              <a:ext uri="{96DAC541-7B7A-43D3-8B79-37D633B846F1}">
+                <asvg:svgBlip xmlns:asvg="http://schemas.microsoft.com/office/drawing/2016/SVG/main" r:embed="rId3"/>
+              </a:ext>
+            </a:extLst>
+          </a:blip>
+          <a:stretch>
+            <a:fillRect/>
+          </a:stretch>
+        </p:blipFill>
+        <p:spPr>
+          <a:xfrm>
+            <a:off x="2111326" y="1325880"/>
+            <a:ext cx="1263748" cy="640080"/>
+          </a:xfrm>
+          <a:prstGeom prst="rect">
+            <a:avLst/>
+          </a:prstGeom>
+        </p:spPr>
+      </p:pic>
+      <p:pic>
+        <p:nvPicPr>
+          <p:cNvPr id="6" name="Image 1" descr="preencoded.png"/>
+          <p:cNvPicPr>
+            <a:picLocks noChangeAspect="1"/>
+          </p:cNvPicPr>
+          <p:nvPr/>
+        </p:nvPicPr>
+        <p:blipFill>
+          <a:blip>
+            <a:extLst>
+              <a:ext uri="{96DAC541-7B7A-43D3-8B79-37D633B846F1}">
+                <asvg:svgBlip xmlns:asvg="http://schemas.microsoft.com/office/drawing/2016/SVG/main" r:embed="rId4"/>
+              </a:ext>
+            </a:extLst>
+          </a:blip>
+          <a:stretch>
+            <a:fillRect/>
+          </a:stretch>
+        </p:blipFill>
+        <p:spPr>
+          <a:xfrm>
+            <a:off x="1487593" y="2148840"/>
+            <a:ext cx="4065693" cy="896112"/>
+          </a:xfrm>
+          <a:prstGeom prst="rect">
+            <a:avLst/>
+          </a:prstGeom>
+        </p:spPr>
+      </p:pic>
+      <p:sp>
+        <p:nvSpPr>
+          <p:cNvPr id="7" name="Shape 3"/>
+          <p:cNvSpPr/>
+          <p:nvPr/>
+        </p:nvSpPr>
+        <p:spPr>
+          <a:xfrm>
+            <a:off x="6583680" y="1554480"/>
+            <a:ext cx="4389120" cy="960120"/>
+          </a:xfrm>
+          <a:prstGeom prst="roundRect">
+            <a:avLst>
+              <a:gd name="adj" fmla="val 6667"/>
+            </a:avLst>
+          </a:prstGeom>
+          <a:solidFill>
+            <a:srgbClr val="EDF3F7"/>
+          </a:solidFill>
+          <a:ln w="17780">
+            <a:solidFill>
+              <a:srgbClr val="16324F"/>
+            </a:solidFill>
+            <a:prstDash val="solid"/>
+          </a:ln>
+          <a:effectLst>
+            <a:outerShdw blurRad="19050" dist="7620" dir="2700000" algn="bl" rotWithShape="0">
+              <a:srgbClr val="000000">
+                <a:alpha val="12000"/>
+              </a:srgbClr>
+            </a:outerShdw>
+          </a:effectLst>
+        </p:spPr>
+        <p:txBody>
+          <a:bodyPr/>
+          <a:lstStyle/>
+          <a:p>
+            <a:endParaRPr lang="en-US"/>
+          </a:p>
+        </p:txBody>
+      </p:sp>
+      <p:sp>
+        <p:nvSpPr>
+          <p:cNvPr id="8" name="Text 4"/>
+          <p:cNvSpPr/>
+          <p:nvPr/>
+        </p:nvSpPr>
+        <p:spPr>
+          <a:xfrm>
+            <a:off x="6729984" y="1664208"/>
+            <a:ext cx="4096512" cy="740664"/>
+          </a:xfrm>
+          <a:prstGeom prst="rect">
+            <a:avLst/>
+          </a:prstGeom>
+          <a:noFill/>
+          <a:ln/>
+        </p:spPr>
+        <p:txBody>
+          <a:bodyPr wrap="square" lIns="0" tIns="0" rIns="0" bIns="0" rtlCol="0" anchor="ctr"/>
+          <a:lstStyle/>
+          <a:p>
+            <a:pPr marL="0" indent="0" algn="l">
+              <a:buNone/>
+            </a:pPr>
+            <a:r>
+              <a:rPr lang="en-US" sz="2100" b="1" dirty="0">
+                <a:solidFill>
+                  <a:srgbClr val="16324F"/>
+                </a:solidFill>
+                <a:latin typeface="Aptos" pitchFamily="34" charset="0"/>
+                <a:ea typeface="Aptos" pitchFamily="34" charset="-122"/>
+                <a:cs typeface="Aptos" pitchFamily="34" charset="-120"/>
+              </a:rPr>
+              <a:t>Time spacing T ↔ frequency spacing Ω_s = 2π/T</a:t>
+            </a:r>
+            <a:endParaRPr lang="en-US" sz="2100" dirty="0"/>
+          </a:p>
+        </p:txBody>
+      </p:sp>
+      <p:sp>
+        <p:nvSpPr>
+          <p:cNvPr id="9" name="Shape 5"/>
+          <p:cNvSpPr/>
+          <p:nvPr/>
+        </p:nvSpPr>
+        <p:spPr>
+          <a:xfrm>
+            <a:off x="6583680" y="2880360"/>
+            <a:ext cx="4389120" cy="960120"/>
+          </a:xfrm>
+          <a:prstGeom prst="roundRect">
+            <a:avLst>
+              <a:gd name="adj" fmla="val 6667"/>
+            </a:avLst>
+          </a:prstGeom>
+          <a:solidFill>
+            <a:srgbClr val="FFF2E6"/>
+          </a:solidFill>
+          <a:ln w="17780">
+            <a:solidFill>
+              <a:srgbClr val="F28E2B"/>
+            </a:solidFill>
+            <a:prstDash val="solid"/>
+          </a:ln>
+          <a:effectLst>
+            <a:outerShdw blurRad="19050" dist="7620" dir="2700000" algn="bl" rotWithShape="0">
+              <a:srgbClr val="000000">
+                <a:alpha val="12000"/>
+              </a:srgbClr>
+            </a:outerShdw>
+          </a:effectLst>
+        </p:spPr>
+        <p:txBody>
+          <a:bodyPr/>
+          <a:lstStyle/>
+          <a:p>
+            <a:endParaRPr lang="en-US"/>
+          </a:p>
+        </p:txBody>
+      </p:sp>
+      <p:sp>
+        <p:nvSpPr>
+          <p:cNvPr id="10" name="Text 6"/>
+          <p:cNvSpPr/>
+          <p:nvPr/>
+        </p:nvSpPr>
+        <p:spPr>
+          <a:xfrm>
+            <a:off x="6729984" y="2990088"/>
+            <a:ext cx="4096512" cy="740664"/>
+          </a:xfrm>
+          <a:prstGeom prst="rect">
+            <a:avLst/>
+          </a:prstGeom>
+          <a:noFill/>
+          <a:ln/>
+        </p:spPr>
+        <p:txBody>
+          <a:bodyPr wrap="square" lIns="0" tIns="0" rIns="0" bIns="0" rtlCol="0" anchor="ctr"/>
+          <a:lstStyle/>
+          <a:p>
+            <a:pPr marL="0" indent="0" algn="l">
+              <a:buNone/>
+            </a:pPr>
+            <a:r>
+              <a:rPr lang="en-US" sz="2000" dirty="0">
+                <a:solidFill>
+                  <a:srgbClr val="7A4212"/>
+                </a:solidFill>
+                <a:latin typeface="Aptos" pitchFamily="34" charset="0"/>
+                <a:ea typeface="Aptos" pitchFamily="34" charset="-122"/>
+                <a:cs typeface="Aptos" pitchFamily="34" charset="-120"/>
+              </a:rPr>
+              <a:t>This is the mechanism that creates spectral replicas.</a:t>
+            </a:r>
+            <a:endParaRPr lang="en-US" sz="2000" dirty="0"/>
+          </a:p>
+        </p:txBody>
+      </p:sp>
+      <p:sp>
+        <p:nvSpPr>
+          <p:cNvPr id="25" name="Slide Number Placeholder 0"/>
+          <p:cNvSpPr>
+            <a:spLocks noGrp="1"/>
+          </p:cNvSpPr>
+          <p:nvPr>
+            <p:ph type="sldNum" sz="quarter" idx="4294967295"/>
+          </p:nvPr>
+        </p:nvSpPr>
+        <p:spPr>
+          <a:xfrm>
+            <a:off x="11201400" y="6547104"/>
+            <a:ext cx="502920" cy="164592"/>
+          </a:xfrm>
+          <a:prstGeom prst="rect">
+            <a:avLst/>
+          </a:prstGeom>
+          <a:extLst>
+            <a:ext uri="{C572A759-6A51-4108-AA02-DFA0A04FC94B}">
+              <ma14:wrappingTextBoxFlag xmlns="" xmlns:ma14="http://schemas.microsoft.com/office/mac/drawingml/2011/main" val="0"/>
+            </a:ext>
+          </a:extLst>
+        </p:spPr>
+        <p:txBody>
+          <a:bodyPr lIns="0" tIns="0" rIns="0" bIns="0"/>
+          <a:lstStyle>
+            <a:lvl1pPr>
+              <a:defRPr sz="900">
+                <a:solidFill>
+                  <a:srgbClr val="7B8790"/>
+                </a:solidFill>
+                <a:latin typeface="Aptos"/>
+                <a:ea typeface="Aptos"/>
+                <a:cs typeface="Aptos"/>
+              </a:defRPr>
+            </a:lvl1pPr>
+          </a:lstStyle>
+          <a:p>
+            <a:pPr algn="r"/>
+            <a:fld id="{F7021451-1387-4CA6-816F-3879F97B5CBC}" type="slidenum">
+              <a:rPr lang="en-US" b="0"/>
+              <a:t>10</a:t>
+            </a:fld>
+            <a:endParaRPr lang="en-US"/>
+          </a:p>
+        </p:txBody>
+      </p:sp>
+    </p:spTree>
+  </p:cSld>
+  <p:clrMapOvr>
+    <a:masterClrMapping/>
+  </p:clrMapOvr>
+</p:sld>
+</file>
+
+<file path=ppt/slides/slide11.xml><?xml version="1.0" encoding="utf-8"?>
+<p:sld xmlns:a="http://schemas.openxmlformats.org/drawingml/2006/main" xmlns:r="http://schemas.openxmlformats.org/officeDocument/2006/relationships" xmlns:p="http://schemas.openxmlformats.org/presentationml/2006/main">
   <p:cSld name="Slide 9">
     <p:spTree>
       <p:nvGrpSpPr>
@@ -3292,7 +3698,7 @@
           </a:prstGeom>
           <a:extLst>
             <a:ext uri="{C572A759-6A51-4108-AA02-DFA0A04FC94B}">
-              <ma14:wrappingTextBoxFlag xmlns:ma14="http://schemas.microsoft.com/office/mac/drawingml/2011/main" xmlns="" val="0"/>
+              <ma14:wrappingTextBoxFlag xmlns="" xmlns:ma14="http://schemas.microsoft.com/office/mac/drawingml/2011/main" val="0"/>
             </a:ext>
           </a:extLst>
         </p:spPr>
@@ -3314,7 +3720,7 @@
             <a:pPr algn="r"/>
             <a:fld id="{F7021451-1387-4CA6-816F-3879F97B5CBC}" type="slidenum">
               <a:rPr lang="en-US" b="0"/>
-              <a:t>10</a:t>
+              <a:t>11</a:t>
             </a:fld>
             <a:endParaRPr lang="en-US"/>
           </a:p>
@@ -3328,7 +3734,7 @@
 </p:sld>
 </file>
 
-<file path=ppt/slides/slide11.xml><?xml version="1.0" encoding="utf-8"?>
+<file path=ppt/slides/slide12.xml><?xml version="1.0" encoding="utf-8"?>
 <p:sld xmlns:a="http://schemas.openxmlformats.org/drawingml/2006/main" xmlns:r="http://schemas.openxmlformats.org/officeDocument/2006/relationships" xmlns:p="http://schemas.openxmlformats.org/presentationml/2006/main">
   <p:cSld name="Slide 10">
     <p:spTree>
@@ -3540,7 +3946,7 @@
           </a:prstGeom>
           <a:extLst>
             <a:ext uri="{C572A759-6A51-4108-AA02-DFA0A04FC94B}">
-              <ma14:wrappingTextBoxFlag xmlns:ma14="http://schemas.microsoft.com/office/mac/drawingml/2011/main" xmlns="" val="0"/>
+              <ma14:wrappingTextBoxFlag xmlns="" xmlns:ma14="http://schemas.microsoft.com/office/mac/drawingml/2011/main" val="0"/>
             </a:ext>
           </a:extLst>
         </p:spPr>
@@ -3562,7 +3968,7 @@
             <a:pPr algn="r"/>
             <a:fld id="{F7021451-1387-4CA6-816F-3879F97B5CBC}" type="slidenum">
               <a:rPr lang="en-US" b="0"/>
-              <a:t>11</a:t>
+              <a:t>12</a:t>
             </a:fld>
             <a:endParaRPr lang="en-US"/>
           </a:p>
@@ -3576,7 +3982,7 @@
 </p:sld>
 </file>
 
-<file path=ppt/slides/slide12.xml><?xml version="1.0" encoding="utf-8"?>
+<file path=ppt/slides/slide13.xml><?xml version="1.0" encoding="utf-8"?>
 <p:sld xmlns:a="http://schemas.openxmlformats.org/drawingml/2006/main" xmlns:r="http://schemas.openxmlformats.org/officeDocument/2006/relationships" xmlns:p="http://schemas.openxmlformats.org/presentationml/2006/main">
   <p:cSld name="Slide 11">
     <p:spTree>
@@ -3861,7 +4267,7 @@
           </a:prstGeom>
           <a:extLst>
             <a:ext uri="{C572A759-6A51-4108-AA02-DFA0A04FC94B}">
-              <ma14:wrappingTextBoxFlag xmlns:ma14="http://schemas.microsoft.com/office/mac/drawingml/2011/main" xmlns="" val="0"/>
+              <ma14:wrappingTextBoxFlag xmlns="" xmlns:ma14="http://schemas.microsoft.com/office/mac/drawingml/2011/main" val="0"/>
             </a:ext>
           </a:extLst>
         </p:spPr>
@@ -3883,7 +4289,7 @@
             <a:pPr algn="r"/>
             <a:fld id="{F7021451-1387-4CA6-816F-3879F97B5CBC}" type="slidenum">
               <a:rPr lang="en-US" b="0"/>
-              <a:t>12</a:t>
+              <a:t>13</a:t>
             </a:fld>
             <a:endParaRPr lang="en-US"/>
           </a:p>
@@ -3897,7 +4303,7 @@
 </p:sld>
 </file>
 
-<file path=ppt/slides/slide13.xml><?xml version="1.0" encoding="utf-8"?>
+<file path=ppt/slides/slide14.xml><?xml version="1.0" encoding="utf-8"?>
 <p:sld xmlns:a="http://schemas.openxmlformats.org/drawingml/2006/main" xmlns:r="http://schemas.openxmlformats.org/officeDocument/2006/relationships" xmlns:p="http://schemas.openxmlformats.org/presentationml/2006/main">
   <p:cSld name="Slide 12">
     <p:spTree>
@@ -4109,7 +4515,7 @@
           </a:prstGeom>
           <a:extLst>
             <a:ext uri="{C572A759-6A51-4108-AA02-DFA0A04FC94B}">
-              <ma14:wrappingTextBoxFlag xmlns:ma14="http://schemas.microsoft.com/office/mac/drawingml/2011/main" xmlns="" val="0"/>
+              <ma14:wrappingTextBoxFlag xmlns="" xmlns:ma14="http://schemas.microsoft.com/office/mac/drawingml/2011/main" val="0"/>
             </a:ext>
           </a:extLst>
         </p:spPr>
@@ -4131,7 +4537,7 @@
             <a:pPr algn="r"/>
             <a:fld id="{F7021451-1387-4CA6-816F-3879F97B5CBC}" type="slidenum">
               <a:rPr lang="en-US" b="0"/>
-              <a:t>13</a:t>
+              <a:t>14</a:t>
             </a:fld>
             <a:endParaRPr lang="en-US"/>
           </a:p>
@@ -4145,7 +4551,7 @@
 </p:sld>
 </file>
 
-<file path=ppt/slides/slide14.xml><?xml version="1.0" encoding="utf-8"?>
+<file path=ppt/slides/slide15.xml><?xml version="1.0" encoding="utf-8"?>
 <p:sld xmlns:a="http://schemas.openxmlformats.org/drawingml/2006/main" xmlns:r="http://schemas.openxmlformats.org/officeDocument/2006/relationships" xmlns:p="http://schemas.openxmlformats.org/presentationml/2006/main">
   <p:cSld name="Slide 13">
     <p:spTree>
@@ -4314,7 +4720,7 @@
           </a:prstGeom>
           <a:extLst>
             <a:ext uri="{C572A759-6A51-4108-AA02-DFA0A04FC94B}">
-              <ma14:wrappingTextBoxFlag xmlns:ma14="http://schemas.microsoft.com/office/mac/drawingml/2011/main" xmlns="" val="0"/>
+              <ma14:wrappingTextBoxFlag xmlns="" xmlns:ma14="http://schemas.microsoft.com/office/mac/drawingml/2011/main" val="0"/>
             </a:ext>
           </a:extLst>
         </p:spPr>
@@ -4336,7 +4742,7 @@
             <a:pPr algn="r"/>
             <a:fld id="{F7021451-1387-4CA6-816F-3879F97B5CBC}" type="slidenum">
               <a:rPr lang="en-US" b="0"/>
-              <a:t>14</a:t>
+              <a:t>15</a:t>
             </a:fld>
             <a:endParaRPr lang="en-US"/>
           </a:p>
@@ -4350,7 +4756,7 @@
 </p:sld>
 </file>
 
-<file path=ppt/slides/slide15.xml><?xml version="1.0" encoding="utf-8"?>
+<file path=ppt/slides/slide16.xml><?xml version="1.0" encoding="utf-8"?>
 <p:sld xmlns:a="http://schemas.openxmlformats.org/drawingml/2006/main" xmlns:r="http://schemas.openxmlformats.org/officeDocument/2006/relationships" xmlns:p="http://schemas.openxmlformats.org/presentationml/2006/main">
   <p:cSld name="Slide 14">
     <p:spTree>
@@ -4715,7 +5121,7 @@
           </a:prstGeom>
           <a:extLst>
             <a:ext uri="{C572A759-6A51-4108-AA02-DFA0A04FC94B}">
-              <ma14:wrappingTextBoxFlag xmlns:ma14="http://schemas.microsoft.com/office/mac/drawingml/2011/main" xmlns="" val="0"/>
+              <ma14:wrappingTextBoxFlag xmlns="" xmlns:ma14="http://schemas.microsoft.com/office/mac/drawingml/2011/main" val="0"/>
             </a:ext>
           </a:extLst>
         </p:spPr>
@@ -4737,7 +5143,7 @@
             <a:pPr algn="r"/>
             <a:fld id="{F7021451-1387-4CA6-816F-3879F97B5CBC}" type="slidenum">
               <a:rPr lang="en-US" b="0"/>
-              <a:t>15</a:t>
+              <a:t>16</a:t>
             </a:fld>
             <a:endParaRPr lang="en-US"/>
           </a:p>
@@ -4751,7 +5157,7 @@
 </p:sld>
 </file>
 
-<file path=ppt/slides/slide16.xml><?xml version="1.0" encoding="utf-8"?>
+<file path=ppt/slides/slide17.xml><?xml version="1.0" encoding="utf-8"?>
 <p:sld xmlns:a="http://schemas.openxmlformats.org/drawingml/2006/main" xmlns:r="http://schemas.openxmlformats.org/officeDocument/2006/relationships" xmlns:p="http://schemas.openxmlformats.org/presentationml/2006/main">
   <p:cSld name="Slide 15">
     <p:spTree>
@@ -5051,7 +5457,7 @@
           </a:prstGeom>
           <a:extLst>
             <a:ext uri="{C572A759-6A51-4108-AA02-DFA0A04FC94B}">
-              <ma14:wrappingTextBoxFlag xmlns:ma14="http://schemas.microsoft.com/office/mac/drawingml/2011/main" xmlns="" val="0"/>
+              <ma14:wrappingTextBoxFlag xmlns="" xmlns:ma14="http://schemas.microsoft.com/office/mac/drawingml/2011/main" val="0"/>
             </a:ext>
           </a:extLst>
         </p:spPr>
@@ -5073,7 +5479,7 @@
             <a:pPr algn="r"/>
             <a:fld id="{F7021451-1387-4CA6-816F-3879F97B5CBC}" type="slidenum">
               <a:rPr lang="en-US" b="0"/>
-              <a:t>16</a:t>
+              <a:t>17</a:t>
             </a:fld>
             <a:endParaRPr lang="en-US"/>
           </a:p>
@@ -5087,7 +5493,7 @@
 </p:sld>
 </file>
 
-<file path=ppt/slides/slide17.xml><?xml version="1.0" encoding="utf-8"?>
+<file path=ppt/slides/slide18.xml><?xml version="1.0" encoding="utf-8"?>
 <p:sld xmlns:a="http://schemas.openxmlformats.org/drawingml/2006/main" xmlns:r="http://schemas.openxmlformats.org/officeDocument/2006/relationships" xmlns:p="http://schemas.openxmlformats.org/presentationml/2006/main">
   <p:cSld name="Slide 16">
     <p:spTree>
@@ -5860,7 +6266,7 @@
           </a:prstGeom>
           <a:extLst>
             <a:ext uri="{C572A759-6A51-4108-AA02-DFA0A04FC94B}">
-              <ma14:wrappingTextBoxFlag xmlns:ma14="http://schemas.microsoft.com/office/mac/drawingml/2011/main" xmlns="" val="0"/>
+              <ma14:wrappingTextBoxFlag xmlns="" xmlns:ma14="http://schemas.microsoft.com/office/mac/drawingml/2011/main" val="0"/>
             </a:ext>
           </a:extLst>
         </p:spPr>
@@ -5882,7 +6288,7 @@
             <a:pPr algn="r"/>
             <a:fld id="{F7021451-1387-4CA6-816F-3879F97B5CBC}" type="slidenum">
               <a:rPr lang="en-US" b="0"/>
-              <a:t>17</a:t>
+              <a:t>18</a:t>
             </a:fld>
             <a:endParaRPr lang="en-US"/>
           </a:p>
@@ -5896,7 +6302,7 @@
 </p:sld>
 </file>
 
-<file path=ppt/slides/slide18.xml><?xml version="1.0" encoding="utf-8"?>
+<file path=ppt/slides/slide19.xml><?xml version="1.0" encoding="utf-8"?>
 <p:sld xmlns:a="http://schemas.openxmlformats.org/drawingml/2006/main" xmlns:r="http://schemas.openxmlformats.org/officeDocument/2006/relationships" xmlns:p="http://schemas.openxmlformats.org/presentationml/2006/main">
   <p:cSld name="Slide 17">
     <p:spTree>
@@ -6446,182 +6852,7 @@
           </a:prstGeom>
           <a:extLst>
             <a:ext uri="{C572A759-6A51-4108-AA02-DFA0A04FC94B}">
-              <ma14:wrappingTextBoxFlag xmlns:ma14="http://schemas.microsoft.com/office/mac/drawingml/2011/main" xmlns="" val="0"/>
-            </a:ext>
-          </a:extLst>
-        </p:spPr>
-        <p:txBody>
-          <a:bodyPr lIns="0" tIns="0" rIns="0" bIns="0"/>
-          <a:lstStyle>
-            <a:lvl1pPr>
-              <a:defRPr sz="900">
-                <a:solidFill>
-                  <a:srgbClr val="7B8790"/>
-                </a:solidFill>
-                <a:latin typeface="Aptos"/>
-                <a:ea typeface="Aptos"/>
-                <a:cs typeface="Aptos"/>
-              </a:defRPr>
-            </a:lvl1pPr>
-          </a:lstStyle>
-          <a:p>
-            <a:pPr algn="r"/>
-            <a:fld id="{F7021451-1387-4CA6-816F-3879F97B5CBC}" type="slidenum">
-              <a:rPr lang="en-US" b="0"/>
-              <a:t>18</a:t>
-            </a:fld>
-            <a:endParaRPr lang="en-US"/>
-          </a:p>
-        </p:txBody>
-      </p:sp>
-    </p:spTree>
-  </p:cSld>
-  <p:clrMapOvr>
-    <a:masterClrMapping/>
-  </p:clrMapOvr>
-</p:sld>
-</file>
-
-<file path=ppt/slides/slide19.xml><?xml version="1.0" encoding="utf-8"?>
-<p:sld xmlns:a="http://schemas.openxmlformats.org/drawingml/2006/main" xmlns:r="http://schemas.openxmlformats.org/officeDocument/2006/relationships" xmlns:p="http://schemas.openxmlformats.org/presentationml/2006/main">
-  <p:cSld name="Slide 18">
-    <p:spTree>
-      <p:nvGrpSpPr>
-        <p:cNvPr id="1" name=""/>
-        <p:cNvGrpSpPr/>
-        <p:nvPr/>
-      </p:nvGrpSpPr>
-      <p:grpSpPr>
-        <a:xfrm>
-          <a:off x="0" y="0"/>
-          <a:ext cx="0" cy="0"/>
-          <a:chOff x="0" y="0"/>
-          <a:chExt cx="0" cy="0"/>
-        </a:xfrm>
-      </p:grpSpPr>
-      <p:sp>
-        <p:nvSpPr>
-          <p:cNvPr id="2" name="Text 0"/>
-          <p:cNvSpPr/>
-          <p:nvPr/>
-        </p:nvSpPr>
-        <p:spPr>
-          <a:xfrm>
-            <a:off x="566928" y="384048"/>
-            <a:ext cx="11018520" cy="457200"/>
-          </a:xfrm>
-          <a:prstGeom prst="rect">
-            <a:avLst/>
-          </a:prstGeom>
-          <a:noFill/>
-          <a:ln/>
-        </p:spPr>
-        <p:txBody>
-          <a:bodyPr wrap="square" lIns="0" tIns="0" rIns="0" bIns="0" rtlCol="0" anchor="ctr"/>
-          <a:lstStyle/>
-          <a:p>
-            <a:pPr marL="0" indent="0">
-              <a:buNone/>
-            </a:pPr>
-            <a:r>
-              <a:rPr lang="en-US" sz="3000" b="1" dirty="0">
-                <a:solidFill>
-                  <a:srgbClr val="16324F"/>
-                </a:solidFill>
-                <a:latin typeface="Aptos" pitchFamily="34" charset="0"/>
-                <a:ea typeface="Aptos" pitchFamily="34" charset="-122"/>
-                <a:cs typeface="Aptos" pitchFamily="34" charset="-120"/>
-              </a:rPr>
-              <a:t>What the ML system “sees”: original 48 kHz spectrogram</a:t>
-            </a:r>
-            <a:endParaRPr lang="en-US" sz="3000" dirty="0"/>
-          </a:p>
-        </p:txBody>
-      </p:sp>
-      <p:sp>
-        <p:nvSpPr>
-          <p:cNvPr id="3" name="Text 1"/>
-          <p:cNvSpPr/>
-          <p:nvPr/>
-        </p:nvSpPr>
-        <p:spPr>
-          <a:xfrm>
-            <a:off x="594360" y="886968"/>
-            <a:ext cx="10789920" cy="310896"/>
-          </a:xfrm>
-          <a:prstGeom prst="rect">
-            <a:avLst/>
-          </a:prstGeom>
-          <a:noFill/>
-          <a:ln/>
-        </p:spPr>
-        <p:txBody>
-          <a:bodyPr wrap="square" lIns="0" tIns="0" rIns="0" bIns="0" rtlCol="0" anchor="ctr"/>
-          <a:lstStyle/>
-          <a:p>
-            <a:pPr marL="0" indent="0">
-              <a:buNone/>
-            </a:pPr>
-            <a:r>
-              <a:rPr lang="en-US" sz="1550" dirty="0">
-                <a:solidFill>
-                  <a:srgbClr val="53616E"/>
-                </a:solidFill>
-                <a:latin typeface="Aptos" pitchFamily="34" charset="0"/>
-                <a:ea typeface="Aptos" pitchFamily="34" charset="-122"/>
-                <a:cs typeface="Aptos" pitchFamily="34" charset="-120"/>
-              </a:rPr>
-              <a:t>The synthetic voice-like signal contains harmonics plus a deliberate 10 kHz component.</a:t>
-            </a:r>
-            <a:endParaRPr lang="en-US" sz="1550" dirty="0"/>
-          </a:p>
-        </p:txBody>
-      </p:sp>
-      <p:pic>
-        <p:nvPicPr>
-          <p:cNvPr id="4" name="Image 0" descr="/mnt/data/week2_dsp_ml/assets/spec_clean.png"/>
-          <p:cNvPicPr>
-            <a:picLocks noChangeAspect="1"/>
-          </p:cNvPicPr>
-          <p:nvPr/>
-        </p:nvPicPr>
-        <p:blipFill>
-          <a:blip r:embed="rId3"/>
-          <a:stretch>
-            <a:fillRect/>
-          </a:stretch>
-        </p:blipFill>
-        <p:spPr>
-          <a:xfrm>
-            <a:off x="1209159" y="1280160"/>
-            <a:ext cx="9743203" cy="4572000"/>
-          </a:xfrm>
-          <a:prstGeom prst="rect">
-            <a:avLst/>
-          </a:prstGeom>
-        </p:spPr>
-      </p:pic>
-      <p:sp>
-        <p:nvSpPr>
-          <p:cNvPr id="25" name="Slide Number Placeholder 0"/>
-          <p:cNvSpPr>
-            <a:spLocks noGrp="1"/>
-          </p:cNvSpPr>
-          <p:nvPr>
-            <p:ph type="sldNum" sz="quarter" idx="4294967295"/>
-          </p:nvPr>
-        </p:nvSpPr>
-        <p:spPr>
-          <a:xfrm>
-            <a:off x="11201400" y="6547104"/>
-            <a:ext cx="502920" cy="164592"/>
-          </a:xfrm>
-          <a:prstGeom prst="rect">
-            <a:avLst/>
-          </a:prstGeom>
-          <a:extLst>
-            <a:ext uri="{C572A759-6A51-4108-AA02-DFA0A04FC94B}">
-              <ma14:wrappingTextBoxFlag xmlns:ma14="http://schemas.microsoft.com/office/mac/drawingml/2011/main" xmlns="" val="0"/>
+              <ma14:wrappingTextBoxFlag xmlns="" xmlns:ma14="http://schemas.microsoft.com/office/mac/drawingml/2011/main" val="0"/>
             </a:ext>
           </a:extLst>
         </p:spPr>
@@ -6965,7 +7196,7 @@
           </a:prstGeom>
           <a:extLst>
             <a:ext uri="{C572A759-6A51-4108-AA02-DFA0A04FC94B}">
-              <ma14:wrappingTextBoxFlag xmlns:ma14="http://schemas.microsoft.com/office/mac/drawingml/2011/main" xmlns="" val="0"/>
+              <ma14:wrappingTextBoxFlag xmlns="" xmlns:ma14="http://schemas.microsoft.com/office/mac/drawingml/2011/main" val="0"/>
             </a:ext>
           </a:extLst>
         </p:spPr>
@@ -7002,6 +7233,181 @@
 </file>
 
 <file path=ppt/slides/slide20.xml><?xml version="1.0" encoding="utf-8"?>
+<p:sld xmlns:a="http://schemas.openxmlformats.org/drawingml/2006/main" xmlns:r="http://schemas.openxmlformats.org/officeDocument/2006/relationships" xmlns:p="http://schemas.openxmlformats.org/presentationml/2006/main">
+  <p:cSld name="Slide 18">
+    <p:spTree>
+      <p:nvGrpSpPr>
+        <p:cNvPr id="1" name=""/>
+        <p:cNvGrpSpPr/>
+        <p:nvPr/>
+      </p:nvGrpSpPr>
+      <p:grpSpPr>
+        <a:xfrm>
+          <a:off x="0" y="0"/>
+          <a:ext cx="0" cy="0"/>
+          <a:chOff x="0" y="0"/>
+          <a:chExt cx="0" cy="0"/>
+        </a:xfrm>
+      </p:grpSpPr>
+      <p:sp>
+        <p:nvSpPr>
+          <p:cNvPr id="2" name="Text 0"/>
+          <p:cNvSpPr/>
+          <p:nvPr/>
+        </p:nvSpPr>
+        <p:spPr>
+          <a:xfrm>
+            <a:off x="566928" y="384048"/>
+            <a:ext cx="11018520" cy="457200"/>
+          </a:xfrm>
+          <a:prstGeom prst="rect">
+            <a:avLst/>
+          </a:prstGeom>
+          <a:noFill/>
+          <a:ln/>
+        </p:spPr>
+        <p:txBody>
+          <a:bodyPr wrap="square" lIns="0" tIns="0" rIns="0" bIns="0" rtlCol="0" anchor="ctr"/>
+          <a:lstStyle/>
+          <a:p>
+            <a:pPr marL="0" indent="0">
+              <a:buNone/>
+            </a:pPr>
+            <a:r>
+              <a:rPr lang="en-US" sz="3000" b="1" dirty="0">
+                <a:solidFill>
+                  <a:srgbClr val="16324F"/>
+                </a:solidFill>
+                <a:latin typeface="Aptos" pitchFamily="34" charset="0"/>
+                <a:ea typeface="Aptos" pitchFamily="34" charset="-122"/>
+                <a:cs typeface="Aptos" pitchFamily="34" charset="-120"/>
+              </a:rPr>
+              <a:t>What the ML system “sees”: original 48 kHz spectrogram</a:t>
+            </a:r>
+            <a:endParaRPr lang="en-US" sz="3000" dirty="0"/>
+          </a:p>
+        </p:txBody>
+      </p:sp>
+      <p:sp>
+        <p:nvSpPr>
+          <p:cNvPr id="3" name="Text 1"/>
+          <p:cNvSpPr/>
+          <p:nvPr/>
+        </p:nvSpPr>
+        <p:spPr>
+          <a:xfrm>
+            <a:off x="594360" y="886968"/>
+            <a:ext cx="10789920" cy="310896"/>
+          </a:xfrm>
+          <a:prstGeom prst="rect">
+            <a:avLst/>
+          </a:prstGeom>
+          <a:noFill/>
+          <a:ln/>
+        </p:spPr>
+        <p:txBody>
+          <a:bodyPr wrap="square" lIns="0" tIns="0" rIns="0" bIns="0" rtlCol="0" anchor="ctr"/>
+          <a:lstStyle/>
+          <a:p>
+            <a:pPr marL="0" indent="0">
+              <a:buNone/>
+            </a:pPr>
+            <a:r>
+              <a:rPr lang="en-US" sz="1550" dirty="0">
+                <a:solidFill>
+                  <a:srgbClr val="53616E"/>
+                </a:solidFill>
+                <a:latin typeface="Aptos" pitchFamily="34" charset="0"/>
+                <a:ea typeface="Aptos" pitchFamily="34" charset="-122"/>
+                <a:cs typeface="Aptos" pitchFamily="34" charset="-120"/>
+              </a:rPr>
+              <a:t>The synthetic voice-like signal contains harmonics plus a deliberate 10 kHz component.</a:t>
+            </a:r>
+            <a:endParaRPr lang="en-US" sz="1550" dirty="0"/>
+          </a:p>
+        </p:txBody>
+      </p:sp>
+      <p:pic>
+        <p:nvPicPr>
+          <p:cNvPr id="4" name="Image 0" descr="/mnt/data/week2_dsp_ml/assets/spec_clean.png"/>
+          <p:cNvPicPr>
+            <a:picLocks noChangeAspect="1"/>
+          </p:cNvPicPr>
+          <p:nvPr/>
+        </p:nvPicPr>
+        <p:blipFill>
+          <a:blip r:embed="rId3"/>
+          <a:stretch>
+            <a:fillRect/>
+          </a:stretch>
+        </p:blipFill>
+        <p:spPr>
+          <a:xfrm>
+            <a:off x="1209159" y="1280160"/>
+            <a:ext cx="9743203" cy="4572000"/>
+          </a:xfrm>
+          <a:prstGeom prst="rect">
+            <a:avLst/>
+          </a:prstGeom>
+        </p:spPr>
+      </p:pic>
+      <p:sp>
+        <p:nvSpPr>
+          <p:cNvPr id="25" name="Slide Number Placeholder 0"/>
+          <p:cNvSpPr>
+            <a:spLocks noGrp="1"/>
+          </p:cNvSpPr>
+          <p:nvPr>
+            <p:ph type="sldNum" sz="quarter" idx="4294967295"/>
+          </p:nvPr>
+        </p:nvSpPr>
+        <p:spPr>
+          <a:xfrm>
+            <a:off x="11201400" y="6547104"/>
+            <a:ext cx="502920" cy="164592"/>
+          </a:xfrm>
+          <a:prstGeom prst="rect">
+            <a:avLst/>
+          </a:prstGeom>
+          <a:extLst>
+            <a:ext uri="{C572A759-6A51-4108-AA02-DFA0A04FC94B}">
+              <ma14:wrappingTextBoxFlag xmlns="" xmlns:ma14="http://schemas.microsoft.com/office/mac/drawingml/2011/main" val="0"/>
+            </a:ext>
+          </a:extLst>
+        </p:spPr>
+        <p:txBody>
+          <a:bodyPr lIns="0" tIns="0" rIns="0" bIns="0"/>
+          <a:lstStyle>
+            <a:lvl1pPr>
+              <a:defRPr sz="900">
+                <a:solidFill>
+                  <a:srgbClr val="7B8790"/>
+                </a:solidFill>
+                <a:latin typeface="Aptos"/>
+                <a:ea typeface="Aptos"/>
+                <a:cs typeface="Aptos"/>
+              </a:defRPr>
+            </a:lvl1pPr>
+          </a:lstStyle>
+          <a:p>
+            <a:pPr algn="r"/>
+            <a:fld id="{F7021451-1387-4CA6-816F-3879F97B5CBC}" type="slidenum">
+              <a:rPr lang="en-US" b="0"/>
+              <a:t>20</a:t>
+            </a:fld>
+            <a:endParaRPr lang="en-US"/>
+          </a:p>
+        </p:txBody>
+      </p:sp>
+    </p:spTree>
+  </p:cSld>
+  <p:clrMapOvr>
+    <a:masterClrMapping/>
+  </p:clrMapOvr>
+</p:sld>
+</file>
+
+<file path=ppt/slides/slide21.xml><?xml version="1.0" encoding="utf-8"?>
 <p:sld xmlns:a="http://schemas.openxmlformats.org/drawingml/2006/main" xmlns:r="http://schemas.openxmlformats.org/officeDocument/2006/relationships" xmlns:p="http://schemas.openxmlformats.org/presentationml/2006/main">
   <p:cSld name="Slide 19">
     <p:spTree>
@@ -7213,7 +7619,7 @@
           </a:prstGeom>
           <a:extLst>
             <a:ext uri="{C572A759-6A51-4108-AA02-DFA0A04FC94B}">
-              <ma14:wrappingTextBoxFlag xmlns:ma14="http://schemas.microsoft.com/office/mac/drawingml/2011/main" xmlns="" val="0"/>
+              <ma14:wrappingTextBoxFlag xmlns="" xmlns:ma14="http://schemas.microsoft.com/office/mac/drawingml/2011/main" val="0"/>
             </a:ext>
           </a:extLst>
         </p:spPr>
@@ -7235,7 +7641,7 @@
             <a:pPr algn="r"/>
             <a:fld id="{F7021451-1387-4CA6-816F-3879F97B5CBC}" type="slidenum">
               <a:rPr lang="en-US" b="0"/>
-              <a:t>20</a:t>
+              <a:t>21</a:t>
             </a:fld>
             <a:endParaRPr lang="en-US"/>
           </a:p>
@@ -7249,7 +7655,7 @@
 </p:sld>
 </file>
 
-<file path=ppt/slides/slide21.xml><?xml version="1.0" encoding="utf-8"?>
+<file path=ppt/slides/slide22.xml><?xml version="1.0" encoding="utf-8"?>
 <p:sld xmlns:a="http://schemas.openxmlformats.org/drawingml/2006/main" xmlns:r="http://schemas.openxmlformats.org/officeDocument/2006/relationships" xmlns:p="http://schemas.openxmlformats.org/presentationml/2006/main">
   <p:cSld name="Slide 20">
     <p:spTree>
@@ -7461,7 +7867,7 @@
           </a:prstGeom>
           <a:extLst>
             <a:ext uri="{C572A759-6A51-4108-AA02-DFA0A04FC94B}">
-              <ma14:wrappingTextBoxFlag xmlns:ma14="http://schemas.microsoft.com/office/mac/drawingml/2011/main" xmlns="" val="0"/>
+              <ma14:wrappingTextBoxFlag xmlns="" xmlns:ma14="http://schemas.microsoft.com/office/mac/drawingml/2011/main" val="0"/>
             </a:ext>
           </a:extLst>
         </p:spPr>
@@ -7483,7 +7889,7 @@
             <a:pPr algn="r"/>
             <a:fld id="{F7021451-1387-4CA6-816F-3879F97B5CBC}" type="slidenum">
               <a:rPr lang="en-US" b="0"/>
-              <a:t>21</a:t>
+              <a:t>22</a:t>
             </a:fld>
             <a:endParaRPr lang="en-US"/>
           </a:p>
@@ -7497,7 +7903,7 @@
 </p:sld>
 </file>
 
-<file path=ppt/slides/slide22.xml><?xml version="1.0" encoding="utf-8"?>
+<file path=ppt/slides/slide23.xml><?xml version="1.0" encoding="utf-8"?>
 <p:sld xmlns:a="http://schemas.openxmlformats.org/drawingml/2006/main" xmlns:r="http://schemas.openxmlformats.org/officeDocument/2006/relationships" xmlns:p="http://schemas.openxmlformats.org/presentationml/2006/main">
   <p:cSld name="Slide 21">
     <p:spTree>
@@ -7852,7 +8258,7 @@
           </a:prstGeom>
           <a:extLst>
             <a:ext uri="{C572A759-6A51-4108-AA02-DFA0A04FC94B}">
-              <ma14:wrappingTextBoxFlag xmlns:ma14="http://schemas.microsoft.com/office/mac/drawingml/2011/main" xmlns="" val="0"/>
+              <ma14:wrappingTextBoxFlag xmlns="" xmlns:ma14="http://schemas.microsoft.com/office/mac/drawingml/2011/main" val="0"/>
             </a:ext>
           </a:extLst>
         </p:spPr>
@@ -7874,7 +8280,7 @@
             <a:pPr algn="r"/>
             <a:fld id="{F7021451-1387-4CA6-816F-3879F97B5CBC}" type="slidenum">
               <a:rPr lang="en-US" b="0"/>
-              <a:t>22</a:t>
+              <a:t>23</a:t>
             </a:fld>
             <a:endParaRPr lang="en-US"/>
           </a:p>
@@ -7888,7 +8294,7 @@
 </p:sld>
 </file>
 
-<file path=ppt/slides/slide23.xml><?xml version="1.0" encoding="utf-8"?>
+<file path=ppt/slides/slide24.xml><?xml version="1.0" encoding="utf-8"?>
 <p:sld xmlns:a="http://schemas.openxmlformats.org/drawingml/2006/main" xmlns:r="http://schemas.openxmlformats.org/officeDocument/2006/relationships" xmlns:p="http://schemas.openxmlformats.org/presentationml/2006/main">
   <p:cSld>
     <p:spTree>
@@ -8348,7 +8754,7 @@
           </a:prstGeom>
           <a:extLst>
             <a:ext uri="{C572A759-6A51-4108-AA02-DFA0A04FC94B}">
-              <ma14:wrappingTextBoxFlag xmlns="" xmlns:ma14="http://schemas.microsoft.com/office/mac/drawingml/2011/main" val="0"/>
+              <ma14:wrappingTextBoxFlag xmlns:ma14="http://schemas.microsoft.com/office/mac/drawingml/2011/main" xmlns="" val="0"/>
             </a:ext>
           </a:extLst>
         </p:spPr>
@@ -8370,7 +8776,7 @@
             <a:pPr algn="r"/>
             <a:fld id="{F7021451-1387-4CA6-816F-3879F97B5CBC}" type="slidenum">
               <a:rPr lang="en-US" b="0"/>
-              <a:t>23</a:t>
+              <a:t>24</a:t>
             </a:fld>
             <a:endParaRPr lang="en-US"/>
           </a:p>
@@ -8389,7 +8795,7 @@
 </p:sld>
 </file>
 
-<file path=ppt/slides/slide24.xml><?xml version="1.0" encoding="utf-8"?>
+<file path=ppt/slides/slide25.xml><?xml version="1.0" encoding="utf-8"?>
 <p:sld xmlns:a="http://schemas.openxmlformats.org/drawingml/2006/main" xmlns:r="http://schemas.openxmlformats.org/officeDocument/2006/relationships" xmlns:p="http://schemas.openxmlformats.org/presentationml/2006/main">
   <p:cSld name="Slide 22">
     <p:spTree>
@@ -8696,7 +9102,7 @@
           </a:prstGeom>
           <a:extLst>
             <a:ext uri="{C572A759-6A51-4108-AA02-DFA0A04FC94B}">
-              <ma14:wrappingTextBoxFlag xmlns:ma14="http://schemas.microsoft.com/office/mac/drawingml/2011/main" xmlns="" val="0"/>
+              <ma14:wrappingTextBoxFlag xmlns="" xmlns:ma14="http://schemas.microsoft.com/office/mac/drawingml/2011/main" val="0"/>
             </a:ext>
           </a:extLst>
         </p:spPr>
@@ -8718,7 +9124,7 @@
             <a:pPr algn="r"/>
             <a:fld id="{F7021451-1387-4CA6-816F-3879F97B5CBC}" type="slidenum">
               <a:rPr lang="en-US" b="0"/>
-              <a:t>24</a:t>
+              <a:t>25</a:t>
             </a:fld>
             <a:endParaRPr lang="en-US"/>
           </a:p>
@@ -8951,7 +9357,7 @@
           </a:prstGeom>
           <a:extLst>
             <a:ext uri="{C572A759-6A51-4108-AA02-DFA0A04FC94B}">
-              <ma14:wrappingTextBoxFlag xmlns:ma14="http://schemas.microsoft.com/office/mac/drawingml/2011/main" xmlns="" val="0"/>
+              <ma14:wrappingTextBoxFlag xmlns="" xmlns:ma14="http://schemas.microsoft.com/office/mac/drawingml/2011/main" val="0"/>
             </a:ext>
           </a:extLst>
         </p:spPr>
@@ -9214,7 +9620,7 @@
           </a:prstGeom>
           <a:extLst>
             <a:ext uri="{C572A759-6A51-4108-AA02-DFA0A04FC94B}">
-              <ma14:wrappingTextBoxFlag xmlns:ma14="http://schemas.microsoft.com/office/mac/drawingml/2011/main" xmlns="" val="0"/>
+              <ma14:wrappingTextBoxFlag xmlns="" xmlns:ma14="http://schemas.microsoft.com/office/mac/drawingml/2011/main" val="0"/>
             </a:ext>
           </a:extLst>
         </p:spPr>
@@ -9547,7 +9953,7 @@
           </a:prstGeom>
           <a:extLst>
             <a:ext uri="{C572A759-6A51-4108-AA02-DFA0A04FC94B}">
-              <ma14:wrappingTextBoxFlag xmlns:ma14="http://schemas.microsoft.com/office/mac/drawingml/2011/main" xmlns="" val="0"/>
+              <ma14:wrappingTextBoxFlag xmlns="" xmlns:ma14="http://schemas.microsoft.com/office/mac/drawingml/2011/main" val="0"/>
             </a:ext>
           </a:extLst>
         </p:spPr>
@@ -9880,7 +10286,7 @@
           </a:prstGeom>
           <a:extLst>
             <a:ext uri="{C572A759-6A51-4108-AA02-DFA0A04FC94B}">
-              <ma14:wrappingTextBoxFlag xmlns:ma14="http://schemas.microsoft.com/office/mac/drawingml/2011/main" xmlns="" val="0"/>
+              <ma14:wrappingTextBoxFlag xmlns="" xmlns:ma14="http://schemas.microsoft.com/office/mac/drawingml/2011/main" val="0"/>
             </a:ext>
           </a:extLst>
         </p:spPr>
@@ -10229,7 +10635,7 @@
           </a:prstGeom>
           <a:extLst>
             <a:ext uri="{C572A759-6A51-4108-AA02-DFA0A04FC94B}">
-              <ma14:wrappingTextBoxFlag xmlns:ma14="http://schemas.microsoft.com/office/mac/drawingml/2011/main" xmlns="" val="0"/>
+              <ma14:wrappingTextBoxFlag xmlns="" xmlns:ma14="http://schemas.microsoft.com/office/mac/drawingml/2011/main" val="0"/>
             </a:ext>
           </a:extLst>
         </p:spPr>
@@ -10554,7 +10960,7 @@
           </a:prstGeom>
           <a:extLst>
             <a:ext uri="{C572A759-6A51-4108-AA02-DFA0A04FC94B}">
-              <ma14:wrappingTextBoxFlag xmlns:ma14="http://schemas.microsoft.com/office/mac/drawingml/2011/main" xmlns="" val="0"/>
+              <ma14:wrappingTextBoxFlag xmlns="" xmlns:ma14="http://schemas.microsoft.com/office/mac/drawingml/2011/main" val="0"/>
             </a:ext>
           </a:extLst>
         </p:spPr>
@@ -10592,7 +10998,7 @@
 
 <file path=ppt/slides/slide9.xml><?xml version="1.0" encoding="utf-8"?>
 <p:sld xmlns:a="http://schemas.openxmlformats.org/drawingml/2006/main" xmlns:r="http://schemas.openxmlformats.org/officeDocument/2006/relationships" xmlns:p="http://schemas.openxmlformats.org/presentationml/2006/main">
-  <p:cSld name="Slide 8">
+  <p:cSld>
     <p:spTree>
       <p:nvGrpSpPr>
         <p:cNvPr id="1" name=""/>
@@ -10607,142 +11013,30 @@
           <a:chExt cx="0" cy="0"/>
         </a:xfrm>
       </p:grpSpPr>
-      <p:sp>
-        <p:nvSpPr>
-          <p:cNvPr id="2" name="Text 0"/>
-          <p:cNvSpPr/>
-          <p:nvPr/>
-        </p:nvSpPr>
-        <p:spPr>
-          <a:xfrm>
-            <a:off x="566928" y="384048"/>
-            <a:ext cx="11018520" cy="457200"/>
-          </a:xfrm>
-          <a:prstGeom prst="rect">
-            <a:avLst/>
-          </a:prstGeom>
-          <a:noFill/>
-          <a:ln/>
-        </p:spPr>
-        <p:txBody>
-          <a:bodyPr wrap="square" lIns="0" tIns="0" rIns="0" bIns="0" rtlCol="0" anchor="ctr"/>
-          <a:lstStyle/>
-          <a:p>
-            <a:pPr marL="0" indent="0">
-              <a:buNone/>
-            </a:pPr>
-            <a:r>
-              <a:rPr lang="en-US" sz="3000" b="1" dirty="0">
-                <a:solidFill>
-                  <a:srgbClr val="16324F"/>
-                </a:solidFill>
-                <a:latin typeface="Aptos" pitchFamily="34" charset="0"/>
-                <a:ea typeface="Aptos" pitchFamily="34" charset="-122"/>
-                <a:cs typeface="Aptos" pitchFamily="34" charset="-120"/>
-              </a:rPr>
-              <a:t>The impulse train is periodic in both time and frequency</a:t>
-            </a:r>
-            <a:endParaRPr lang="en-US" sz="3000" dirty="0"/>
-          </a:p>
-        </p:txBody>
-      </p:sp>
-      <p:sp>
-        <p:nvSpPr>
-          <p:cNvPr id="3" name="Text 1"/>
-          <p:cNvSpPr/>
-          <p:nvPr/>
-        </p:nvSpPr>
-        <p:spPr>
-          <a:xfrm>
-            <a:off x="594360" y="886968"/>
-            <a:ext cx="10789920" cy="310896"/>
-          </a:xfrm>
-          <a:prstGeom prst="rect">
-            <a:avLst/>
-          </a:prstGeom>
-          <a:noFill/>
-          <a:ln/>
-        </p:spPr>
-        <p:txBody>
-          <a:bodyPr wrap="square" lIns="0" tIns="0" rIns="0" bIns="0" rtlCol="0" anchor="ctr"/>
-          <a:lstStyle/>
-          <a:p>
-            <a:pPr marL="0" indent="0">
-              <a:buNone/>
-            </a:pPr>
-            <a:r>
-              <a:rPr lang="en-US" sz="1550" dirty="0">
-                <a:solidFill>
-                  <a:srgbClr val="53616E"/>
-                </a:solidFill>
-                <a:latin typeface="Aptos" pitchFamily="34" charset="0"/>
-                <a:ea typeface="Aptos" pitchFamily="34" charset="-122"/>
-                <a:cs typeface="Aptos" pitchFamily="34" charset="-120"/>
-              </a:rPr>
-              <a:t>A periodic train of impulses transforms to another impulse train.</a:t>
-            </a:r>
-            <a:endParaRPr lang="en-US" sz="1550" dirty="0"/>
-          </a:p>
-        </p:txBody>
-      </p:sp>
-      <p:sp>
-        <p:nvSpPr>
-          <p:cNvPr id="4" name="Shape 2"/>
-          <p:cNvSpPr/>
-          <p:nvPr/>
-        </p:nvSpPr>
-        <p:spPr>
-          <a:xfrm>
-            <a:off x="749808" y="1271016"/>
-            <a:ext cx="3986784" cy="749808"/>
-          </a:xfrm>
-          <a:prstGeom prst="roundRect">
-            <a:avLst>
-              <a:gd name="adj" fmla="val 6098"/>
-            </a:avLst>
-          </a:prstGeom>
-          <a:solidFill>
-            <a:srgbClr val="F7FAFC"/>
-          </a:solidFill>
-          <a:ln w="12700">
-            <a:solidFill>
-              <a:srgbClr val="DCE6EC"/>
-            </a:solidFill>
-            <a:prstDash val="solid"/>
-          </a:ln>
-        </p:spPr>
-        <p:txBody>
-          <a:bodyPr/>
-          <a:lstStyle/>
-          <a:p>
-            <a:endParaRPr lang="en-US"/>
-          </a:p>
-        </p:txBody>
-      </p:sp>
       <p:pic>
         <p:nvPicPr>
-          <p:cNvPr id="5" name="Image 0" descr="preencoded.png"/>
+          <p:cNvPr id="3" name="Picture 2">
+            <a:extLst>
+              <a:ext uri="{FF2B5EF4-FFF2-40B4-BE49-F238E27FC236}">
+                <a16:creationId xmlns:a16="http://schemas.microsoft.com/office/drawing/2014/main" id="{E50CB0D8-1C78-80CC-B53D-70C384168CCA}"/>
+              </a:ext>
+            </a:extLst>
+          </p:cNvPr>
           <p:cNvPicPr>
             <a:picLocks noChangeAspect="1"/>
           </p:cNvPicPr>
           <p:nvPr/>
         </p:nvPicPr>
         <p:blipFill>
-          <a:blip>
-            <a:extLst>
-              <a:ext uri="{96DAC541-7B7A-43D3-8B79-37D633B846F1}">
-                <asvg:svgBlip xmlns:asvg="http://schemas.microsoft.com/office/drawing/2016/SVG/main" r:embed="rId3"/>
-              </a:ext>
-            </a:extLst>
-          </a:blip>
+          <a:blip r:embed="rId2"/>
           <a:stretch>
             <a:fillRect/>
           </a:stretch>
         </p:blipFill>
         <p:spPr>
           <a:xfrm>
-            <a:off x="2111326" y="1325880"/>
-            <a:ext cx="1263748" cy="640080"/>
+            <a:off x="492578" y="1202871"/>
+            <a:ext cx="4502852" cy="2226129"/>
           </a:xfrm>
           <a:prstGeom prst="rect">
             <a:avLst/>
@@ -10751,243 +11045,105 @@
       </p:pic>
       <p:pic>
         <p:nvPicPr>
-          <p:cNvPr id="6" name="Image 1" descr="preencoded.png"/>
+          <p:cNvPr id="5" name="Picture 4">
+            <a:extLst>
+              <a:ext uri="{FF2B5EF4-FFF2-40B4-BE49-F238E27FC236}">
+                <a16:creationId xmlns:a16="http://schemas.microsoft.com/office/drawing/2014/main" id="{10D2ACAA-A29C-7BEC-BAB4-5CD008D97025}"/>
+              </a:ext>
+            </a:extLst>
+          </p:cNvPr>
           <p:cNvPicPr>
             <a:picLocks noChangeAspect="1"/>
           </p:cNvPicPr>
           <p:nvPr/>
         </p:nvPicPr>
         <p:blipFill>
-          <a:blip>
-            <a:extLst>
-              <a:ext uri="{96DAC541-7B7A-43D3-8B79-37D633B846F1}">
-                <asvg:svgBlip xmlns:asvg="http://schemas.microsoft.com/office/drawing/2016/SVG/main" r:embed="rId4"/>
-              </a:ext>
-            </a:extLst>
-          </a:blip>
+          <a:blip r:embed="rId3"/>
           <a:stretch>
             <a:fillRect/>
           </a:stretch>
         </p:blipFill>
         <p:spPr>
           <a:xfrm>
-            <a:off x="1487593" y="2148840"/>
-            <a:ext cx="4065693" cy="896112"/>
+            <a:off x="5508686" y="527957"/>
+            <a:ext cx="6065550" cy="4838210"/>
           </a:xfrm>
           <a:prstGeom prst="rect">
             <a:avLst/>
           </a:prstGeom>
         </p:spPr>
       </p:pic>
-      <p:sp>
-        <p:nvSpPr>
-          <p:cNvPr id="7" name="Shape 3"/>
-          <p:cNvSpPr/>
-          <p:nvPr/>
-        </p:nvSpPr>
-        <p:spPr>
-          <a:xfrm>
-            <a:off x="6583680" y="1554480"/>
-            <a:ext cx="4389120" cy="960120"/>
-          </a:xfrm>
-          <a:prstGeom prst="roundRect">
-            <a:avLst>
-              <a:gd name="adj" fmla="val 6667"/>
-            </a:avLst>
-          </a:prstGeom>
-          <a:solidFill>
-            <a:srgbClr val="EDF3F7"/>
-          </a:solidFill>
-          <a:ln w="17780">
-            <a:solidFill>
-              <a:srgbClr val="16324F"/>
-            </a:solidFill>
-            <a:prstDash val="solid"/>
-          </a:ln>
-          <a:effectLst>
-            <a:outerShdw blurRad="19050" dist="7620" dir="2700000" algn="bl" rotWithShape="0">
-              <a:srgbClr val="000000">
-                <a:alpha val="12000"/>
-              </a:srgbClr>
-            </a:outerShdw>
-          </a:effectLst>
-        </p:spPr>
-        <p:txBody>
-          <a:bodyPr/>
-          <a:lstStyle/>
-          <a:p>
-            <a:endParaRPr lang="en-US"/>
-          </a:p>
-        </p:txBody>
-      </p:sp>
-      <p:sp>
-        <p:nvSpPr>
-          <p:cNvPr id="8" name="Text 4"/>
-          <p:cNvSpPr/>
-          <p:nvPr/>
-        </p:nvSpPr>
-        <p:spPr>
-          <a:xfrm>
-            <a:off x="6729984" y="1664208"/>
-            <a:ext cx="4096512" cy="740664"/>
+      <p:pic>
+        <p:nvPicPr>
+          <p:cNvPr id="7" name="Picture 6">
+            <a:extLst>
+              <a:ext uri="{FF2B5EF4-FFF2-40B4-BE49-F238E27FC236}">
+                <a16:creationId xmlns:a16="http://schemas.microsoft.com/office/drawing/2014/main" id="{B6EB3118-479B-8019-F782-6C7D0AD25166}"/>
+              </a:ext>
+            </a:extLst>
+          </p:cNvPr>
+          <p:cNvPicPr>
+            <a:picLocks noChangeAspect="1"/>
+          </p:cNvPicPr>
+          <p:nvPr/>
+        </p:nvPicPr>
+        <p:blipFill>
+          <a:blip r:embed="rId4"/>
+          <a:stretch>
+            <a:fillRect/>
+          </a:stretch>
+        </p:blipFill>
+        <p:spPr>
+          <a:xfrm>
+            <a:off x="402772" y="5445772"/>
+            <a:ext cx="8240486" cy="923114"/>
+          </a:xfrm>
+          <a:prstGeom prst="rect">
+            <a:avLst/>
+          </a:prstGeom>
+        </p:spPr>
+      </p:pic>
+      <p:sp>
+        <p:nvSpPr>
+          <p:cNvPr id="8" name="TextBox 7">
+            <a:extLst>
+              <a:ext uri="{FF2B5EF4-FFF2-40B4-BE49-F238E27FC236}">
+                <a16:creationId xmlns:a16="http://schemas.microsoft.com/office/drawing/2014/main" id="{841E1053-D9AE-54F3-BDB2-88ABC4AF832B}"/>
+              </a:ext>
+            </a:extLst>
+          </p:cNvPr>
+          <p:cNvSpPr txBox="1"/>
+          <p:nvPr/>
+        </p:nvSpPr>
+        <p:spPr>
+          <a:xfrm>
+            <a:off x="449035" y="402771"/>
+            <a:ext cx="5316840" cy="523220"/>
           </a:xfrm>
           <a:prstGeom prst="rect">
             <a:avLst/>
           </a:prstGeom>
           <a:noFill/>
-          <a:ln/>
-        </p:spPr>
-        <p:txBody>
-          <a:bodyPr wrap="square" lIns="0" tIns="0" rIns="0" bIns="0" rtlCol="0" anchor="ctr"/>
-          <a:lstStyle/>
-          <a:p>
-            <a:pPr marL="0" indent="0" algn="l">
-              <a:buNone/>
-            </a:pPr>
-            <a:r>
-              <a:rPr lang="en-US" sz="2100" b="1" dirty="0">
-                <a:solidFill>
-                  <a:srgbClr val="16324F"/>
-                </a:solidFill>
-                <a:latin typeface="Aptos" pitchFamily="34" charset="0"/>
-                <a:ea typeface="Aptos" pitchFamily="34" charset="-122"/>
-                <a:cs typeface="Aptos" pitchFamily="34" charset="-120"/>
-              </a:rPr>
-              <a:t>Time spacing T ↔ frequency spacing Ω_s = 2π/T</a:t>
-            </a:r>
-            <a:endParaRPr lang="en-US" sz="2100" dirty="0"/>
-          </a:p>
-        </p:txBody>
-      </p:sp>
-      <p:sp>
-        <p:nvSpPr>
-          <p:cNvPr id="9" name="Shape 5"/>
-          <p:cNvSpPr/>
-          <p:nvPr/>
-        </p:nvSpPr>
-        <p:spPr>
-          <a:xfrm>
-            <a:off x="6583680" y="2880360"/>
-            <a:ext cx="4389120" cy="960120"/>
-          </a:xfrm>
-          <a:prstGeom prst="roundRect">
-            <a:avLst>
-              <a:gd name="adj" fmla="val 6667"/>
-            </a:avLst>
-          </a:prstGeom>
-          <a:solidFill>
-            <a:srgbClr val="FFF2E6"/>
-          </a:solidFill>
-          <a:ln w="17780">
-            <a:solidFill>
-              <a:srgbClr val="F28E2B"/>
-            </a:solidFill>
-            <a:prstDash val="solid"/>
-          </a:ln>
-          <a:effectLst>
-            <a:outerShdw blurRad="19050" dist="7620" dir="2700000" algn="bl" rotWithShape="0">
-              <a:srgbClr val="000000">
-                <a:alpha val="12000"/>
-              </a:srgbClr>
-            </a:outerShdw>
-          </a:effectLst>
-        </p:spPr>
-        <p:txBody>
-          <a:bodyPr/>
-          <a:lstStyle/>
-          <a:p>
-            <a:endParaRPr lang="en-US"/>
-          </a:p>
-        </p:txBody>
-      </p:sp>
-      <p:sp>
-        <p:nvSpPr>
-          <p:cNvPr id="10" name="Text 6"/>
-          <p:cNvSpPr/>
-          <p:nvPr/>
-        </p:nvSpPr>
-        <p:spPr>
-          <a:xfrm>
-            <a:off x="6729984" y="2990088"/>
-            <a:ext cx="4096512" cy="740664"/>
-          </a:xfrm>
-          <a:prstGeom prst="rect">
-            <a:avLst/>
-          </a:prstGeom>
-          <a:noFill/>
-          <a:ln/>
-        </p:spPr>
-        <p:txBody>
-          <a:bodyPr wrap="square" lIns="0" tIns="0" rIns="0" bIns="0" rtlCol="0" anchor="ctr"/>
-          <a:lstStyle/>
-          <a:p>
-            <a:pPr marL="0" indent="0" algn="l">
-              <a:buNone/>
-            </a:pPr>
-            <a:r>
-              <a:rPr lang="en-US" sz="2000" dirty="0">
-                <a:solidFill>
-                  <a:srgbClr val="7A4212"/>
-                </a:solidFill>
-                <a:latin typeface="Aptos" pitchFamily="34" charset="0"/>
-                <a:ea typeface="Aptos" pitchFamily="34" charset="-122"/>
-                <a:cs typeface="Aptos" pitchFamily="34" charset="-120"/>
-              </a:rPr>
-              <a:t>This is the mechanism that creates spectral replicas.</a:t>
-            </a:r>
-            <a:endParaRPr lang="en-US" sz="2000" dirty="0"/>
-          </a:p>
-        </p:txBody>
-      </p:sp>
-      <p:sp>
-        <p:nvSpPr>
-          <p:cNvPr id="25" name="Slide Number Placeholder 0"/>
-          <p:cNvSpPr>
-            <a:spLocks noGrp="1"/>
-          </p:cNvSpPr>
-          <p:nvPr>
-            <p:ph type="sldNum" sz="quarter" idx="4294967295"/>
-          </p:nvPr>
-        </p:nvSpPr>
-        <p:spPr>
-          <a:xfrm>
-            <a:off x="11201400" y="6547104"/>
-            <a:ext cx="502920" cy="164592"/>
-          </a:xfrm>
-          <a:prstGeom prst="rect">
-            <a:avLst/>
-          </a:prstGeom>
-          <a:extLst>
-            <a:ext uri="{C572A759-6A51-4108-AA02-DFA0A04FC94B}">
-              <ma14:wrappingTextBoxFlag xmlns:ma14="http://schemas.microsoft.com/office/mac/drawingml/2011/main" xmlns="" val="0"/>
-            </a:ext>
-          </a:extLst>
-        </p:spPr>
-        <p:txBody>
-          <a:bodyPr lIns="0" tIns="0" rIns="0" bIns="0"/>
-          <a:lstStyle>
-            <a:lvl1pPr>
-              <a:defRPr sz="900">
-                <a:solidFill>
-                  <a:srgbClr val="7B8790"/>
-                </a:solidFill>
-                <a:latin typeface="Aptos"/>
-                <a:ea typeface="Aptos"/>
-                <a:cs typeface="Aptos"/>
-              </a:defRPr>
-            </a:lvl1pPr>
-          </a:lstStyle>
-          <a:p>
-            <a:pPr algn="r"/>
-            <a:fld id="{F7021451-1387-4CA6-816F-3879F97B5CBC}" type="slidenum">
-              <a:rPr lang="en-US" b="0"/>
-              <a:t>9</a:t>
-            </a:fld>
-            <a:endParaRPr lang="en-US"/>
+        </p:spPr>
+        <p:txBody>
+          <a:bodyPr wrap="none" rtlCol="0">
+            <a:spAutoFit/>
+          </a:bodyPr>
+          <a:lstStyle/>
+          <a:p>
+            <a:r>
+              <a:rPr lang="en-US" sz="2800" b="1" dirty="0"/>
+              <a:t>From Oppenheim/Schafer Book</a:t>
+            </a:r>
           </a:p>
         </p:txBody>
       </p:sp>
     </p:spTree>
+    <p:extLst>
+      <p:ext uri="{BB962C8B-B14F-4D97-AF65-F5344CB8AC3E}">
+        <p14:creationId xmlns:p14="http://schemas.microsoft.com/office/powerpoint/2010/main" val="662772665"/>
+      </p:ext>
+    </p:extLst>
   </p:cSld>
   <p:clrMapOvr>
     <a:masterClrMapping/>
